--- a/template.pptx
+++ b/template.pptx
@@ -5,21 +5,22 @@
     <p:sldMasterId id="2147483667" r:id="rId1"/>
   </p:sldMasterIdLst>
   <p:notesMasterIdLst>
-    <p:notesMasterId r:id="rId4"/>
+    <p:notesMasterId r:id="rId5"/>
   </p:notesMasterIdLst>
   <p:sldIdLst>
     <p:sldId id="256" r:id="rId2"/>
     <p:sldId id="257" r:id="rId3"/>
+    <p:sldId id="258" r:id="rId4"/>
   </p:sldIdLst>
   <p:sldSz cx="14630400" cy="8229600"/>
   <p:notesSz cx="8229600" cy="14630400"/>
   <p:embeddedFontLst>
     <p:embeddedFont>
       <p:font typeface="PT Serif" panose="020A0603040505020204" pitchFamily="18" charset="0"/>
-      <p:regular r:id="rId5"/>
-      <p:bold r:id="rId6"/>
-      <p:italic r:id="rId7"/>
-      <p:boldItalic r:id="rId8"/>
+      <p:regular r:id="rId6"/>
+      <p:bold r:id="rId7"/>
+      <p:italic r:id="rId8"/>
+      <p:boldItalic r:id="rId9"/>
     </p:embeddedFont>
   </p:embeddedFontLst>
   <p:defaultTextStyle>
@@ -1658,6 +1659,246 @@
 </p:notes>
 </file>
 
+<file path=ppt/notesSlides/notesSlide3.xml><?xml version="1.0" encoding="utf-8"?>
+<p:notes xmlns:a="http://schemas.openxmlformats.org/drawingml/2006/main" xmlns:r="http://schemas.openxmlformats.org/officeDocument/2006/relationships" xmlns:p="http://schemas.openxmlformats.org/presentationml/2006/main" showMasterSp="0" showMasterPhAnim="0">
+  <p:cSld>
+    <p:spTree>
+      <p:nvGrpSpPr>
+        <p:cNvPr id="1" name="Shape 113"/>
+        <p:cNvGrpSpPr/>
+        <p:nvPr/>
+      </p:nvGrpSpPr>
+      <p:grpSpPr>
+        <a:xfrm>
+          <a:off x="0" y="0"/>
+          <a:ext cx="0" cy="0"/>
+          <a:chOff x="0" y="0"/>
+          <a:chExt cx="0" cy="0"/>
+        </a:xfrm>
+      </p:grpSpPr>
+      <p:sp>
+        <p:nvSpPr>
+          <p:cNvPr id="114" name="Google Shape;114;g3d1ecbdc3be_0_232:notes"/>
+          <p:cNvSpPr txBox="1">
+            <a:spLocks noGrp="1"/>
+          </p:cNvSpPr>
+          <p:nvPr>
+            <p:ph type="body" idx="1"/>
+          </p:nvPr>
+        </p:nvSpPr>
+        <p:spPr>
+          <a:xfrm>
+            <a:off x="822960" y="7040880"/>
+            <a:ext cx="6583800" cy="5760900"/>
+          </a:xfrm>
+          <a:prstGeom prst="rect">
+            <a:avLst/>
+          </a:prstGeom>
+        </p:spPr>
+        <p:txBody>
+          <a:bodyPr spcFirstLastPara="1" wrap="square" lIns="91425" tIns="45700" rIns="91425" bIns="45700" anchor="t" anchorCtr="0">
+            <a:noAutofit/>
+          </a:bodyPr>
+          <a:lstStyle/>
+          <a:p>
+            <a:pPr marL="0" lvl="0" indent="0" algn="l" rtl="0">
+              <a:lnSpc>
+                <a:spcPct val="115000"/>
+              </a:lnSpc>
+              <a:spcBef>
+                <a:spcPts val="1200"/>
+              </a:spcBef>
+              <a:spcAft>
+                <a:spcPts val="0"/>
+              </a:spcAft>
+              <a:buClr>
+                <a:schemeClr val="dk1"/>
+              </a:buClr>
+              <a:buSzPts val="1100"/>
+              <a:buFont typeface="Arial"/>
+              <a:buNone/>
+            </a:pPr>
+            <a:r>
+              <a:rPr lang="en-US" sz="1100">
+                <a:latin typeface="Arial"/>
+                <a:ea typeface="Arial"/>
+                <a:cs typeface="Arial"/>
+                <a:sym typeface="Arial"/>
+              </a:rPr>
+              <a:t>將 LLM 量化至 4-bit 是極具挑戰性的 。LLM 推論包含兩個階段：</a:t>
+            </a:r>
+            <a:endParaRPr sz="1100">
+              <a:latin typeface="Arial"/>
+              <a:ea typeface="Arial"/>
+              <a:cs typeface="Arial"/>
+              <a:sym typeface="Arial"/>
+            </a:endParaRPr>
+          </a:p>
+          <a:p>
+            <a:pPr marL="457200" lvl="0" indent="-298450" algn="l" rtl="0">
+              <a:lnSpc>
+                <a:spcPct val="115000"/>
+              </a:lnSpc>
+              <a:spcBef>
+                <a:spcPts val="1200"/>
+              </a:spcBef>
+              <a:spcAft>
+                <a:spcPts val="0"/>
+              </a:spcAft>
+              <a:buClr>
+                <a:schemeClr val="dk1"/>
+              </a:buClr>
+              <a:buSzPts val="1100"/>
+              <a:buChar char="●"/>
+            </a:pPr>
+            <a:r>
+              <a:rPr lang="en-US" sz="1100" b="1">
+                <a:latin typeface="Arial"/>
+                <a:ea typeface="Arial"/>
+                <a:cs typeface="Arial"/>
+                <a:sym typeface="Arial"/>
+              </a:rPr>
+              <a:t>Prefilling</a:t>
+            </a:r>
+            <a:r>
+              <a:rPr lang="en-US" sz="1100">
+                <a:latin typeface="Arial"/>
+                <a:ea typeface="Arial"/>
+                <a:cs typeface="Arial"/>
+                <a:sym typeface="Arial"/>
+              </a:rPr>
+              <a:t>：受限於計算量（Compute-bound），需要處理數兆次的浮點運算 。</a:t>
+            </a:r>
+            <a:endParaRPr sz="1100">
+              <a:latin typeface="Arial"/>
+              <a:ea typeface="Arial"/>
+              <a:cs typeface="Arial"/>
+              <a:sym typeface="Arial"/>
+            </a:endParaRPr>
+          </a:p>
+          <a:p>
+            <a:pPr marL="457200" lvl="0" indent="-298450" algn="l" rtl="0">
+              <a:lnSpc>
+                <a:spcPct val="115000"/>
+              </a:lnSpc>
+              <a:spcBef>
+                <a:spcPts val="0"/>
+              </a:spcBef>
+              <a:spcAft>
+                <a:spcPts val="0"/>
+              </a:spcAft>
+              <a:buClr>
+                <a:schemeClr val="dk1"/>
+              </a:buClr>
+              <a:buSzPts val="1100"/>
+              <a:buChar char="●"/>
+            </a:pPr>
+            <a:r>
+              <a:rPr lang="en-US" sz="1100" b="1">
+                <a:latin typeface="Arial"/>
+                <a:ea typeface="Arial"/>
+                <a:cs typeface="Arial"/>
+                <a:sym typeface="Arial"/>
+              </a:rPr>
+              <a:t>Generation</a:t>
+            </a:r>
+            <a:r>
+              <a:rPr lang="en-US" sz="1100">
+                <a:latin typeface="Arial"/>
+                <a:ea typeface="Arial"/>
+                <a:cs typeface="Arial"/>
+                <a:sym typeface="Arial"/>
+              </a:rPr>
+              <a:t>：受限於記憶體頻寬（Memory-bound），需反覆讀取 KV cache 。 而最核心的問題在於</a:t>
+            </a:r>
+            <a:r>
+              <a:rPr lang="en-US" sz="1100" b="1">
+                <a:latin typeface="Arial"/>
+                <a:ea typeface="Arial"/>
+                <a:cs typeface="Arial"/>
+                <a:sym typeface="Arial"/>
+              </a:rPr>
+              <a:t>激活值中的離群點（Outliers）</a:t>
+            </a:r>
+            <a:r>
+              <a:rPr lang="en-US" sz="1100">
+                <a:latin typeface="Arial"/>
+                <a:ea typeface="Arial"/>
+                <a:cs typeface="Arial"/>
+                <a:sym typeface="Arial"/>
+              </a:rPr>
+              <a:t>，它們通常比一般值大 20 倍，使得低位元量化變得異常困難 。</a:t>
+            </a:r>
+            <a:endParaRPr sz="1100">
+              <a:latin typeface="Arial"/>
+              <a:ea typeface="Arial"/>
+              <a:cs typeface="Arial"/>
+              <a:sym typeface="Arial"/>
+            </a:endParaRPr>
+          </a:p>
+          <a:p>
+            <a:pPr marL="0" lvl="0" indent="0" algn="l" rtl="0">
+              <a:spcBef>
+                <a:spcPts val="1200"/>
+              </a:spcBef>
+              <a:spcAft>
+                <a:spcPts val="0"/>
+              </a:spcAft>
+              <a:buNone/>
+            </a:pPr>
+            <a:endParaRPr/>
+          </a:p>
+        </p:txBody>
+      </p:sp>
+      <p:sp>
+        <p:nvSpPr>
+          <p:cNvPr id="115" name="Google Shape;115;g3d1ecbdc3be_0_232:notes"/>
+          <p:cNvSpPr>
+            <a:spLocks noGrp="1" noRot="1" noChangeAspect="1"/>
+          </p:cNvSpPr>
+          <p:nvPr>
+            <p:ph type="sldImg" idx="2"/>
+          </p:nvPr>
+        </p:nvSpPr>
+        <p:spPr>
+          <a:xfrm>
+            <a:off x="-273050" y="1828800"/>
+            <a:ext cx="8775700" cy="4937125"/>
+          </a:xfrm>
+          <a:custGeom>
+            <a:avLst/>
+            <a:gdLst/>
+            <a:ahLst/>
+            <a:cxnLst/>
+            <a:rect l="l" t="t" r="r" b="b"/>
+            <a:pathLst>
+              <a:path w="120000" h="120000" extrusionOk="0">
+                <a:moveTo>
+                  <a:pt x="0" y="0"/>
+                </a:moveTo>
+                <a:lnTo>
+                  <a:pt x="120000" y="0"/>
+                </a:lnTo>
+                <a:lnTo>
+                  <a:pt x="120000" y="120000"/>
+                </a:lnTo>
+                <a:lnTo>
+                  <a:pt x="0" y="120000"/>
+                </a:lnTo>
+                <a:close/>
+              </a:path>
+            </a:pathLst>
+          </a:custGeom>
+        </p:spPr>
+      </p:sp>
+    </p:spTree>
+  </p:cSld>
+  <p:clrMapOvr>
+    <a:masterClrMapping/>
+  </p:clrMapOvr>
+</p:notes>
+</file>
+
 <file path=ppt/slideLayouts/slideLayout1.xml><?xml version="1.0" encoding="utf-8"?>
 <p:sldLayout xmlns:a="http://schemas.openxmlformats.org/drawingml/2006/main" xmlns:r="http://schemas.openxmlformats.org/officeDocument/2006/relationships" xmlns:p="http://schemas.openxmlformats.org/presentationml/2006/main" matchingName="Slide 1 master">
   <p:cSld name="Slide 1 master">
@@ -4683,6 +4924,962 @@
 </p:sldLayout>
 </file>
 
+<file path=ppt/slideLayouts/slideLayout19.xml><?xml version="1.0" encoding="utf-8"?>
+<p:sldLayout xmlns:a="http://schemas.openxmlformats.org/drawingml/2006/main" xmlns:r="http://schemas.openxmlformats.org/officeDocument/2006/relationships" xmlns:p="http://schemas.openxmlformats.org/presentationml/2006/main" matchingName="3" type="titleOnly">
+  <p:cSld name="3">
+    <p:spTree>
+      <p:nvGrpSpPr>
+        <p:cNvPr id="1" name="Shape 84"/>
+        <p:cNvGrpSpPr/>
+        <p:nvPr/>
+      </p:nvGrpSpPr>
+      <p:grpSpPr>
+        <a:xfrm>
+          <a:off x="0" y="0"/>
+          <a:ext cx="0" cy="0"/>
+          <a:chOff x="0" y="0"/>
+          <a:chExt cx="0" cy="0"/>
+        </a:xfrm>
+      </p:grpSpPr>
+      <p:grpSp>
+        <p:nvGrpSpPr>
+          <p:cNvPr id="85" name="Google Shape;85;p20"/>
+          <p:cNvGrpSpPr/>
+          <p:nvPr/>
+        </p:nvGrpSpPr>
+        <p:grpSpPr>
+          <a:xfrm>
+            <a:off x="11772502" y="2567376"/>
+            <a:ext cx="2857898" cy="5662224"/>
+            <a:chOff x="9810418" y="2139480"/>
+            <a:chExt cx="2381582" cy="4718520"/>
+          </a:xfrm>
+        </p:grpSpPr>
+        <p:pic>
+          <p:nvPicPr>
+            <p:cNvPr id="86" name="Google Shape;86;p20"/>
+            <p:cNvPicPr preferRelativeResize="0"/>
+            <p:nvPr/>
+          </p:nvPicPr>
+          <p:blipFill rotWithShape="1">
+            <a:blip r:embed="rId2">
+              <a:alphaModFix/>
+            </a:blip>
+            <a:srcRect/>
+            <a:stretch/>
+          </p:blipFill>
+          <p:spPr>
+            <a:xfrm rot="10800000">
+              <a:off x="9810418" y="4476418"/>
+              <a:ext cx="2381582" cy="2381582"/>
+            </a:xfrm>
+            <a:prstGeom prst="rect">
+              <a:avLst/>
+            </a:prstGeom>
+            <a:noFill/>
+            <a:ln>
+              <a:noFill/>
+            </a:ln>
+          </p:spPr>
+        </p:pic>
+        <p:pic>
+          <p:nvPicPr>
+            <p:cNvPr id="87" name="Google Shape;87;p20"/>
+            <p:cNvPicPr preferRelativeResize="0"/>
+            <p:nvPr/>
+          </p:nvPicPr>
+          <p:blipFill rotWithShape="1">
+            <a:blip r:embed="rId2">
+              <a:alphaModFix/>
+            </a:blip>
+            <a:srcRect/>
+            <a:stretch/>
+          </p:blipFill>
+          <p:spPr>
+            <a:xfrm rot="-5400000">
+              <a:off x="9810418" y="2139480"/>
+              <a:ext cx="2381582" cy="2381582"/>
+            </a:xfrm>
+            <a:prstGeom prst="rect">
+              <a:avLst/>
+            </a:prstGeom>
+            <a:noFill/>
+            <a:ln>
+              <a:noFill/>
+            </a:ln>
+          </p:spPr>
+        </p:pic>
+      </p:grpSp>
+      <p:sp>
+        <p:nvSpPr>
+          <p:cNvPr id="88" name="Google Shape;88;p20"/>
+          <p:cNvSpPr/>
+          <p:nvPr/>
+        </p:nvSpPr>
+        <p:spPr>
+          <a:xfrm>
+            <a:off x="0" y="0"/>
+            <a:ext cx="730800" cy="8303400"/>
+          </a:xfrm>
+          <a:prstGeom prst="rect">
+            <a:avLst/>
+          </a:prstGeom>
+          <a:solidFill>
+            <a:srgbClr val="052E6E"/>
+          </a:solidFill>
+          <a:ln>
+            <a:noFill/>
+          </a:ln>
+        </p:spPr>
+        <p:txBody>
+          <a:bodyPr spcFirstLastPara="1" wrap="square" lIns="109700" tIns="54850" rIns="109700" bIns="54850" anchor="ctr" anchorCtr="0">
+            <a:noAutofit/>
+          </a:bodyPr>
+          <a:lstStyle/>
+          <a:p>
+            <a:pPr marL="0" marR="0" lvl="0" indent="0" algn="ctr" rtl="0">
+              <a:spcBef>
+                <a:spcPts val="0"/>
+              </a:spcBef>
+              <a:spcAft>
+                <a:spcPts val="0"/>
+              </a:spcAft>
+              <a:buNone/>
+            </a:pPr>
+            <a:endParaRPr sz="2200" b="0" i="0" u="none" strike="noStrike" cap="none">
+              <a:solidFill>
+                <a:schemeClr val="lt1"/>
+              </a:solidFill>
+              <a:latin typeface="Calibri"/>
+              <a:ea typeface="Calibri"/>
+              <a:cs typeface="Calibri"/>
+              <a:sym typeface="Calibri"/>
+            </a:endParaRPr>
+          </a:p>
+        </p:txBody>
+      </p:sp>
+      <p:sp>
+        <p:nvSpPr>
+          <p:cNvPr id="89" name="Google Shape;89;p20"/>
+          <p:cNvSpPr/>
+          <p:nvPr/>
+        </p:nvSpPr>
+        <p:spPr>
+          <a:xfrm rot="2452991">
+            <a:off x="12187960" y="6698831"/>
+            <a:ext cx="2202647" cy="757132"/>
+          </a:xfrm>
+          <a:prstGeom prst="rect">
+            <a:avLst/>
+          </a:prstGeom>
+        </p:spPr>
+        <p:txBody>
+          <a:bodyPr>
+            <a:prstTxWarp prst="textPlain">
+              <a:avLst/>
+            </a:prstTxWarp>
+          </a:bodyPr>
+          <a:lstStyle/>
+          <a:p>
+            <a:pPr lvl="0" algn="ctr"/>
+            <a:r>
+              <a:rPr b="0" i="0">
+                <a:ln>
+                  <a:noFill/>
+                </a:ln>
+                <a:solidFill>
+                  <a:srgbClr val="052E6E"/>
+                </a:solidFill>
+                <a:latin typeface="Calibri"/>
+              </a:rPr>
+              <a:t>NYCU</a:t>
+            </a:r>
+          </a:p>
+        </p:txBody>
+      </p:sp>
+      <p:cxnSp>
+        <p:nvCxnSpPr>
+          <p:cNvPr id="90" name="Google Shape;90;p20"/>
+          <p:cNvCxnSpPr/>
+          <p:nvPr/>
+        </p:nvCxnSpPr>
+        <p:spPr>
+          <a:xfrm>
+            <a:off x="10171458" y="2028826"/>
+            <a:ext cx="4470000" cy="0"/>
+          </a:xfrm>
+          <a:prstGeom prst="straightConnector1">
+            <a:avLst/>
+          </a:prstGeom>
+          <a:noFill/>
+          <a:ln w="68575" cap="flat" cmpd="sng">
+            <a:solidFill>
+              <a:schemeClr val="accent5"/>
+            </a:solidFill>
+            <a:prstDash val="lgDash"/>
+            <a:round/>
+            <a:headEnd type="none" w="sm" len="sm"/>
+            <a:tailEnd type="none" w="sm" len="sm"/>
+          </a:ln>
+        </p:spPr>
+      </p:cxnSp>
+      <p:sp>
+        <p:nvSpPr>
+          <p:cNvPr id="91" name="Google Shape;91;p20"/>
+          <p:cNvSpPr txBox="1">
+            <a:spLocks noGrp="1"/>
+          </p:cNvSpPr>
+          <p:nvPr>
+            <p:ph type="title"/>
+          </p:nvPr>
+        </p:nvSpPr>
+        <p:spPr>
+          <a:xfrm>
+            <a:off x="1005840" y="438150"/>
+            <a:ext cx="11707800" cy="1590900"/>
+          </a:xfrm>
+          <a:prstGeom prst="rect">
+            <a:avLst/>
+          </a:prstGeom>
+          <a:noFill/>
+          <a:ln>
+            <a:noFill/>
+          </a:ln>
+        </p:spPr>
+        <p:txBody>
+          <a:bodyPr spcFirstLastPara="1" wrap="square" lIns="109700" tIns="54850" rIns="109700" bIns="54850" anchor="ctr" anchorCtr="0">
+            <a:normAutofit/>
+          </a:bodyPr>
+          <a:lstStyle>
+            <a:lvl1pPr lvl="0" algn="l">
+              <a:lnSpc>
+                <a:spcPct val="90000"/>
+              </a:lnSpc>
+              <a:spcBef>
+                <a:spcPts val="0"/>
+              </a:spcBef>
+              <a:spcAft>
+                <a:spcPts val="0"/>
+              </a:spcAft>
+              <a:buClr>
+                <a:schemeClr val="dk1"/>
+              </a:buClr>
+              <a:buSzPts val="5400"/>
+              <a:buFont typeface="Calibri"/>
+              <a:buChar char="●"/>
+              <a:defRPr sz="5400">
+                <a:solidFill>
+                  <a:schemeClr val="dk1"/>
+                </a:solidFill>
+                <a:latin typeface="Calibri"/>
+                <a:ea typeface="Calibri"/>
+                <a:cs typeface="Calibri"/>
+                <a:sym typeface="Calibri"/>
+              </a:defRPr>
+            </a:lvl1pPr>
+            <a:lvl2pPr lvl="1">
+              <a:spcBef>
+                <a:spcPts val="0"/>
+              </a:spcBef>
+              <a:spcAft>
+                <a:spcPts val="0"/>
+              </a:spcAft>
+              <a:buSzPts val="1700"/>
+              <a:buNone/>
+              <a:defRPr sz="1700"/>
+            </a:lvl2pPr>
+            <a:lvl3pPr lvl="2">
+              <a:spcBef>
+                <a:spcPts val="0"/>
+              </a:spcBef>
+              <a:spcAft>
+                <a:spcPts val="0"/>
+              </a:spcAft>
+              <a:buSzPts val="1700"/>
+              <a:buNone/>
+              <a:defRPr sz="1700"/>
+            </a:lvl3pPr>
+            <a:lvl4pPr lvl="3">
+              <a:spcBef>
+                <a:spcPts val="0"/>
+              </a:spcBef>
+              <a:spcAft>
+                <a:spcPts val="0"/>
+              </a:spcAft>
+              <a:buSzPts val="1700"/>
+              <a:buNone/>
+              <a:defRPr sz="1700"/>
+            </a:lvl4pPr>
+            <a:lvl5pPr lvl="4">
+              <a:spcBef>
+                <a:spcPts val="0"/>
+              </a:spcBef>
+              <a:spcAft>
+                <a:spcPts val="0"/>
+              </a:spcAft>
+              <a:buSzPts val="1700"/>
+              <a:buNone/>
+              <a:defRPr sz="1700"/>
+            </a:lvl5pPr>
+            <a:lvl6pPr lvl="5">
+              <a:spcBef>
+                <a:spcPts val="0"/>
+              </a:spcBef>
+              <a:spcAft>
+                <a:spcPts val="0"/>
+              </a:spcAft>
+              <a:buSzPts val="1700"/>
+              <a:buNone/>
+              <a:defRPr sz="1700"/>
+            </a:lvl6pPr>
+            <a:lvl7pPr lvl="6">
+              <a:spcBef>
+                <a:spcPts val="0"/>
+              </a:spcBef>
+              <a:spcAft>
+                <a:spcPts val="0"/>
+              </a:spcAft>
+              <a:buSzPts val="1700"/>
+              <a:buNone/>
+              <a:defRPr sz="1700"/>
+            </a:lvl7pPr>
+            <a:lvl8pPr lvl="7">
+              <a:spcBef>
+                <a:spcPts val="0"/>
+              </a:spcBef>
+              <a:spcAft>
+                <a:spcPts val="0"/>
+              </a:spcAft>
+              <a:buSzPts val="1700"/>
+              <a:buNone/>
+              <a:defRPr sz="1700"/>
+            </a:lvl8pPr>
+            <a:lvl9pPr lvl="8">
+              <a:spcBef>
+                <a:spcPts val="0"/>
+              </a:spcBef>
+              <a:spcAft>
+                <a:spcPts val="0"/>
+              </a:spcAft>
+              <a:buSzPts val="1700"/>
+              <a:buNone/>
+              <a:defRPr sz="1700"/>
+            </a:lvl9pPr>
+          </a:lstStyle>
+          <a:p>
+            <a:endParaRPr/>
+          </a:p>
+        </p:txBody>
+      </p:sp>
+      <p:sp>
+        <p:nvSpPr>
+          <p:cNvPr id="92" name="Google Shape;92;p20"/>
+          <p:cNvSpPr txBox="1">
+            <a:spLocks noGrp="1"/>
+          </p:cNvSpPr>
+          <p:nvPr>
+            <p:ph type="dt" idx="10"/>
+          </p:nvPr>
+        </p:nvSpPr>
+        <p:spPr>
+          <a:xfrm>
+            <a:off x="1005840" y="7627620"/>
+            <a:ext cx="3291900" cy="438000"/>
+          </a:xfrm>
+          <a:prstGeom prst="rect">
+            <a:avLst/>
+          </a:prstGeom>
+          <a:noFill/>
+          <a:ln>
+            <a:noFill/>
+          </a:ln>
+        </p:spPr>
+        <p:txBody>
+          <a:bodyPr spcFirstLastPara="1" wrap="square" lIns="109700" tIns="54850" rIns="109700" bIns="54850" anchor="ctr" anchorCtr="0">
+            <a:noAutofit/>
+          </a:bodyPr>
+          <a:lstStyle>
+            <a:lvl1pPr lvl="0" algn="l">
+              <a:spcBef>
+                <a:spcPts val="0"/>
+              </a:spcBef>
+              <a:spcAft>
+                <a:spcPts val="0"/>
+              </a:spcAft>
+              <a:buSzPts val="1700"/>
+              <a:buNone/>
+              <a:defRPr sz="1700"/>
+            </a:lvl1pPr>
+            <a:lvl2pPr lvl="1" algn="l">
+              <a:spcBef>
+                <a:spcPts val="0"/>
+              </a:spcBef>
+              <a:spcAft>
+                <a:spcPts val="0"/>
+              </a:spcAft>
+              <a:buSzPts val="1700"/>
+              <a:buNone/>
+              <a:defRPr sz="1700"/>
+            </a:lvl2pPr>
+            <a:lvl3pPr lvl="2" algn="l">
+              <a:spcBef>
+                <a:spcPts val="0"/>
+              </a:spcBef>
+              <a:spcAft>
+                <a:spcPts val="0"/>
+              </a:spcAft>
+              <a:buSzPts val="1700"/>
+              <a:buNone/>
+              <a:defRPr sz="1700"/>
+            </a:lvl3pPr>
+            <a:lvl4pPr lvl="3" algn="l">
+              <a:spcBef>
+                <a:spcPts val="0"/>
+              </a:spcBef>
+              <a:spcAft>
+                <a:spcPts val="0"/>
+              </a:spcAft>
+              <a:buSzPts val="1700"/>
+              <a:buNone/>
+              <a:defRPr sz="1700"/>
+            </a:lvl4pPr>
+            <a:lvl5pPr lvl="4" algn="l">
+              <a:spcBef>
+                <a:spcPts val="0"/>
+              </a:spcBef>
+              <a:spcAft>
+                <a:spcPts val="0"/>
+              </a:spcAft>
+              <a:buSzPts val="1700"/>
+              <a:buNone/>
+              <a:defRPr sz="1700"/>
+            </a:lvl5pPr>
+            <a:lvl6pPr lvl="5" algn="l">
+              <a:spcBef>
+                <a:spcPts val="0"/>
+              </a:spcBef>
+              <a:spcAft>
+                <a:spcPts val="0"/>
+              </a:spcAft>
+              <a:buSzPts val="1700"/>
+              <a:buNone/>
+              <a:defRPr sz="1700"/>
+            </a:lvl6pPr>
+            <a:lvl7pPr lvl="6" algn="l">
+              <a:spcBef>
+                <a:spcPts val="0"/>
+              </a:spcBef>
+              <a:spcAft>
+                <a:spcPts val="0"/>
+              </a:spcAft>
+              <a:buSzPts val="1700"/>
+              <a:buNone/>
+              <a:defRPr sz="1700"/>
+            </a:lvl7pPr>
+            <a:lvl8pPr lvl="7" algn="l">
+              <a:spcBef>
+                <a:spcPts val="0"/>
+              </a:spcBef>
+              <a:spcAft>
+                <a:spcPts val="0"/>
+              </a:spcAft>
+              <a:buSzPts val="1700"/>
+              <a:buNone/>
+              <a:defRPr sz="1700"/>
+            </a:lvl8pPr>
+            <a:lvl9pPr lvl="8" algn="l">
+              <a:spcBef>
+                <a:spcPts val="0"/>
+              </a:spcBef>
+              <a:spcAft>
+                <a:spcPts val="0"/>
+              </a:spcAft>
+              <a:buSzPts val="1700"/>
+              <a:buNone/>
+              <a:defRPr sz="1700"/>
+            </a:lvl9pPr>
+          </a:lstStyle>
+          <a:p>
+            <a:endParaRPr/>
+          </a:p>
+        </p:txBody>
+      </p:sp>
+      <p:sp>
+        <p:nvSpPr>
+          <p:cNvPr id="93" name="Google Shape;93;p20"/>
+          <p:cNvSpPr txBox="1">
+            <a:spLocks noGrp="1"/>
+          </p:cNvSpPr>
+          <p:nvPr>
+            <p:ph type="ftr" idx="11"/>
+          </p:nvPr>
+        </p:nvSpPr>
+        <p:spPr>
+          <a:xfrm>
+            <a:off x="4846320" y="7627620"/>
+            <a:ext cx="4937700" cy="438000"/>
+          </a:xfrm>
+          <a:prstGeom prst="rect">
+            <a:avLst/>
+          </a:prstGeom>
+          <a:noFill/>
+          <a:ln>
+            <a:noFill/>
+          </a:ln>
+        </p:spPr>
+        <p:txBody>
+          <a:bodyPr spcFirstLastPara="1" wrap="square" lIns="109700" tIns="54850" rIns="109700" bIns="54850" anchor="ctr" anchorCtr="0">
+            <a:noAutofit/>
+          </a:bodyPr>
+          <a:lstStyle>
+            <a:lvl1pPr lvl="0" algn="ctr">
+              <a:spcBef>
+                <a:spcPts val="0"/>
+              </a:spcBef>
+              <a:spcAft>
+                <a:spcPts val="0"/>
+              </a:spcAft>
+              <a:buSzPts val="1700"/>
+              <a:buNone/>
+              <a:defRPr sz="1700"/>
+            </a:lvl1pPr>
+            <a:lvl2pPr lvl="1" algn="l">
+              <a:spcBef>
+                <a:spcPts val="0"/>
+              </a:spcBef>
+              <a:spcAft>
+                <a:spcPts val="0"/>
+              </a:spcAft>
+              <a:buSzPts val="1700"/>
+              <a:buNone/>
+              <a:defRPr sz="1700"/>
+            </a:lvl2pPr>
+            <a:lvl3pPr lvl="2" algn="l">
+              <a:spcBef>
+                <a:spcPts val="0"/>
+              </a:spcBef>
+              <a:spcAft>
+                <a:spcPts val="0"/>
+              </a:spcAft>
+              <a:buSzPts val="1700"/>
+              <a:buNone/>
+              <a:defRPr sz="1700"/>
+            </a:lvl3pPr>
+            <a:lvl4pPr lvl="3" algn="l">
+              <a:spcBef>
+                <a:spcPts val="0"/>
+              </a:spcBef>
+              <a:spcAft>
+                <a:spcPts val="0"/>
+              </a:spcAft>
+              <a:buSzPts val="1700"/>
+              <a:buNone/>
+              <a:defRPr sz="1700"/>
+            </a:lvl4pPr>
+            <a:lvl5pPr lvl="4" algn="l">
+              <a:spcBef>
+                <a:spcPts val="0"/>
+              </a:spcBef>
+              <a:spcAft>
+                <a:spcPts val="0"/>
+              </a:spcAft>
+              <a:buSzPts val="1700"/>
+              <a:buNone/>
+              <a:defRPr sz="1700"/>
+            </a:lvl5pPr>
+            <a:lvl6pPr lvl="5" algn="l">
+              <a:spcBef>
+                <a:spcPts val="0"/>
+              </a:spcBef>
+              <a:spcAft>
+                <a:spcPts val="0"/>
+              </a:spcAft>
+              <a:buSzPts val="1700"/>
+              <a:buNone/>
+              <a:defRPr sz="1700"/>
+            </a:lvl6pPr>
+            <a:lvl7pPr lvl="6" algn="l">
+              <a:spcBef>
+                <a:spcPts val="0"/>
+              </a:spcBef>
+              <a:spcAft>
+                <a:spcPts val="0"/>
+              </a:spcAft>
+              <a:buSzPts val="1700"/>
+              <a:buNone/>
+              <a:defRPr sz="1700"/>
+            </a:lvl7pPr>
+            <a:lvl8pPr lvl="7" algn="l">
+              <a:spcBef>
+                <a:spcPts val="0"/>
+              </a:spcBef>
+              <a:spcAft>
+                <a:spcPts val="0"/>
+              </a:spcAft>
+              <a:buSzPts val="1700"/>
+              <a:buNone/>
+              <a:defRPr sz="1700"/>
+            </a:lvl8pPr>
+            <a:lvl9pPr lvl="8" algn="l">
+              <a:spcBef>
+                <a:spcPts val="0"/>
+              </a:spcBef>
+              <a:spcAft>
+                <a:spcPts val="0"/>
+              </a:spcAft>
+              <a:buSzPts val="1700"/>
+              <a:buNone/>
+              <a:defRPr sz="1700"/>
+            </a:lvl9pPr>
+          </a:lstStyle>
+          <a:p>
+            <a:endParaRPr/>
+          </a:p>
+        </p:txBody>
+      </p:sp>
+      <p:sp>
+        <p:nvSpPr>
+          <p:cNvPr id="94" name="Google Shape;94;p20"/>
+          <p:cNvSpPr txBox="1">
+            <a:spLocks noGrp="1"/>
+          </p:cNvSpPr>
+          <p:nvPr>
+            <p:ph type="sldNum" idx="12"/>
+          </p:nvPr>
+        </p:nvSpPr>
+        <p:spPr>
+          <a:xfrm>
+            <a:off x="11170264" y="7627620"/>
+            <a:ext cx="3291900" cy="438000"/>
+          </a:xfrm>
+          <a:prstGeom prst="rect">
+            <a:avLst/>
+          </a:prstGeom>
+          <a:noFill/>
+          <a:ln>
+            <a:noFill/>
+          </a:ln>
+        </p:spPr>
+        <p:txBody>
+          <a:bodyPr spcFirstLastPara="1" wrap="square" lIns="109700" tIns="54850" rIns="109700" bIns="54850" anchor="ctr" anchorCtr="0">
+            <a:noAutofit/>
+          </a:bodyPr>
+          <a:lstStyle>
+            <a:lvl1pPr marL="0" lvl="0" indent="0" algn="r">
+              <a:spcBef>
+                <a:spcPts val="0"/>
+              </a:spcBef>
+              <a:buNone/>
+              <a:defRPr sz="1400" b="0" i="0" u="none" strike="noStrike" cap="none">
+                <a:solidFill>
+                  <a:schemeClr val="dk1"/>
+                </a:solidFill>
+                <a:latin typeface="Calibri"/>
+                <a:ea typeface="Calibri"/>
+                <a:cs typeface="Calibri"/>
+                <a:sym typeface="Calibri"/>
+              </a:defRPr>
+            </a:lvl1pPr>
+            <a:lvl2pPr marL="0" lvl="1" indent="0" algn="r">
+              <a:spcBef>
+                <a:spcPts val="0"/>
+              </a:spcBef>
+              <a:buNone/>
+              <a:defRPr sz="1400" b="0" i="0" u="none" strike="noStrike" cap="none">
+                <a:solidFill>
+                  <a:schemeClr val="dk1"/>
+                </a:solidFill>
+                <a:latin typeface="Calibri"/>
+                <a:ea typeface="Calibri"/>
+                <a:cs typeface="Calibri"/>
+                <a:sym typeface="Calibri"/>
+              </a:defRPr>
+            </a:lvl2pPr>
+            <a:lvl3pPr marL="0" lvl="2" indent="0" algn="r">
+              <a:spcBef>
+                <a:spcPts val="0"/>
+              </a:spcBef>
+              <a:buNone/>
+              <a:defRPr sz="1400" b="0" i="0" u="none" strike="noStrike" cap="none">
+                <a:solidFill>
+                  <a:schemeClr val="dk1"/>
+                </a:solidFill>
+                <a:latin typeface="Calibri"/>
+                <a:ea typeface="Calibri"/>
+                <a:cs typeface="Calibri"/>
+                <a:sym typeface="Calibri"/>
+              </a:defRPr>
+            </a:lvl3pPr>
+            <a:lvl4pPr marL="0" lvl="3" indent="0" algn="r">
+              <a:spcBef>
+                <a:spcPts val="0"/>
+              </a:spcBef>
+              <a:buNone/>
+              <a:defRPr sz="1400" b="0" i="0" u="none" strike="noStrike" cap="none">
+                <a:solidFill>
+                  <a:schemeClr val="dk1"/>
+                </a:solidFill>
+                <a:latin typeface="Calibri"/>
+                <a:ea typeface="Calibri"/>
+                <a:cs typeface="Calibri"/>
+                <a:sym typeface="Calibri"/>
+              </a:defRPr>
+            </a:lvl4pPr>
+            <a:lvl5pPr marL="0" lvl="4" indent="0" algn="r">
+              <a:spcBef>
+                <a:spcPts val="0"/>
+              </a:spcBef>
+              <a:buNone/>
+              <a:defRPr sz="1400" b="0" i="0" u="none" strike="noStrike" cap="none">
+                <a:solidFill>
+                  <a:schemeClr val="dk1"/>
+                </a:solidFill>
+                <a:latin typeface="Calibri"/>
+                <a:ea typeface="Calibri"/>
+                <a:cs typeface="Calibri"/>
+                <a:sym typeface="Calibri"/>
+              </a:defRPr>
+            </a:lvl5pPr>
+            <a:lvl6pPr marL="0" lvl="5" indent="0" algn="r">
+              <a:spcBef>
+                <a:spcPts val="0"/>
+              </a:spcBef>
+              <a:buNone/>
+              <a:defRPr sz="1400" b="0" i="0" u="none" strike="noStrike" cap="none">
+                <a:solidFill>
+                  <a:schemeClr val="dk1"/>
+                </a:solidFill>
+                <a:latin typeface="Calibri"/>
+                <a:ea typeface="Calibri"/>
+                <a:cs typeface="Calibri"/>
+                <a:sym typeface="Calibri"/>
+              </a:defRPr>
+            </a:lvl6pPr>
+            <a:lvl7pPr marL="0" lvl="6" indent="0" algn="r">
+              <a:spcBef>
+                <a:spcPts val="0"/>
+              </a:spcBef>
+              <a:buNone/>
+              <a:defRPr sz="1400" b="0" i="0" u="none" strike="noStrike" cap="none">
+                <a:solidFill>
+                  <a:schemeClr val="dk1"/>
+                </a:solidFill>
+                <a:latin typeface="Calibri"/>
+                <a:ea typeface="Calibri"/>
+                <a:cs typeface="Calibri"/>
+                <a:sym typeface="Calibri"/>
+              </a:defRPr>
+            </a:lvl7pPr>
+            <a:lvl8pPr marL="0" lvl="7" indent="0" algn="r">
+              <a:spcBef>
+                <a:spcPts val="0"/>
+              </a:spcBef>
+              <a:buNone/>
+              <a:defRPr sz="1400" b="0" i="0" u="none" strike="noStrike" cap="none">
+                <a:solidFill>
+                  <a:schemeClr val="dk1"/>
+                </a:solidFill>
+                <a:latin typeface="Calibri"/>
+                <a:ea typeface="Calibri"/>
+                <a:cs typeface="Calibri"/>
+                <a:sym typeface="Calibri"/>
+              </a:defRPr>
+            </a:lvl8pPr>
+            <a:lvl9pPr marL="0" lvl="8" indent="0" algn="r">
+              <a:spcBef>
+                <a:spcPts val="0"/>
+              </a:spcBef>
+              <a:buNone/>
+              <a:defRPr sz="1400" b="0" i="0" u="none" strike="noStrike" cap="none">
+                <a:solidFill>
+                  <a:schemeClr val="dk1"/>
+                </a:solidFill>
+                <a:latin typeface="Calibri"/>
+                <a:ea typeface="Calibri"/>
+                <a:cs typeface="Calibri"/>
+                <a:sym typeface="Calibri"/>
+              </a:defRPr>
+            </a:lvl9pPr>
+          </a:lstStyle>
+          <a:p>
+            <a:pPr marL="0" lvl="0" indent="0" algn="r" rtl="0">
+              <a:spcBef>
+                <a:spcPts val="0"/>
+              </a:spcBef>
+              <a:spcAft>
+                <a:spcPts val="0"/>
+              </a:spcAft>
+              <a:buNone/>
+            </a:pPr>
+            <a:fld id="{00000000-1234-1234-1234-123412341234}" type="slidenum">
+              <a:rPr lang="en-US"/>
+              <a:t>‹#›</a:t>
+            </a:fld>
+            <a:endParaRPr/>
+          </a:p>
+        </p:txBody>
+      </p:sp>
+      <p:grpSp>
+        <p:nvGrpSpPr>
+          <p:cNvPr id="95" name="Google Shape;95;p20"/>
+          <p:cNvGrpSpPr/>
+          <p:nvPr/>
+        </p:nvGrpSpPr>
+        <p:grpSpPr>
+          <a:xfrm>
+            <a:off x="12816184" y="163830"/>
+            <a:ext cx="1825200" cy="1576685"/>
+            <a:chOff x="10680153" y="136525"/>
+            <a:chExt cx="1521000" cy="1313904"/>
+          </a:xfrm>
+        </p:grpSpPr>
+        <p:pic>
+          <p:nvPicPr>
+            <p:cNvPr id="96" name="Google Shape;96;p20"/>
+            <p:cNvPicPr preferRelativeResize="0"/>
+            <p:nvPr/>
+          </p:nvPicPr>
+          <p:blipFill rotWithShape="1">
+            <a:blip r:embed="rId3">
+              <a:alphaModFix/>
+            </a:blip>
+            <a:srcRect/>
+            <a:stretch/>
+          </p:blipFill>
+          <p:spPr>
+            <a:xfrm>
+              <a:off x="10832124" y="136525"/>
+              <a:ext cx="1217128" cy="913705"/>
+            </a:xfrm>
+            <a:prstGeom prst="rect">
+              <a:avLst/>
+            </a:prstGeom>
+            <a:noFill/>
+            <a:ln>
+              <a:noFill/>
+            </a:ln>
+          </p:spPr>
+        </p:pic>
+        <p:sp>
+          <p:nvSpPr>
+            <p:cNvPr id="97" name="Google Shape;97;p20"/>
+            <p:cNvSpPr/>
+            <p:nvPr/>
+          </p:nvSpPr>
+          <p:spPr>
+            <a:xfrm>
+              <a:off x="10680153" y="1050229"/>
+              <a:ext cx="1521000" cy="400200"/>
+            </a:xfrm>
+            <a:prstGeom prst="rect">
+              <a:avLst/>
+            </a:prstGeom>
+            <a:noFill/>
+            <a:ln>
+              <a:noFill/>
+            </a:ln>
+          </p:spPr>
+          <p:txBody>
+            <a:bodyPr spcFirstLastPara="1" wrap="square" lIns="109700" tIns="54850" rIns="109700" bIns="54850" anchor="t" anchorCtr="0">
+              <a:noAutofit/>
+            </a:bodyPr>
+            <a:lstStyle/>
+            <a:p>
+              <a:pPr marL="0" marR="0" lvl="0" indent="0" algn="ctr" rtl="0">
+                <a:spcBef>
+                  <a:spcPts val="0"/>
+                </a:spcBef>
+                <a:spcAft>
+                  <a:spcPts val="0"/>
+                </a:spcAft>
+                <a:buNone/>
+              </a:pPr>
+              <a:r>
+                <a:rPr lang="en-US" sz="2400" b="0" i="0" u="none" strike="noStrike" cap="none">
+                  <a:solidFill>
+                    <a:srgbClr val="052E6E"/>
+                  </a:solidFill>
+                  <a:latin typeface="Calibri"/>
+                  <a:ea typeface="Calibri"/>
+                  <a:cs typeface="Calibri"/>
+                  <a:sym typeface="Calibri"/>
+                </a:rPr>
+                <a:t>BASIC LAB</a:t>
+              </a:r>
+              <a:endParaRPr sz="2400" b="0" i="0" u="none" strike="noStrike" cap="none">
+                <a:solidFill>
+                  <a:srgbClr val="052E6E"/>
+                </a:solidFill>
+                <a:latin typeface="Calibri"/>
+                <a:ea typeface="Calibri"/>
+                <a:cs typeface="Calibri"/>
+                <a:sym typeface="Calibri"/>
+              </a:endParaRPr>
+            </a:p>
+          </p:txBody>
+        </p:sp>
+      </p:grpSp>
+      <p:sp>
+        <p:nvSpPr>
+          <p:cNvPr id="98" name="Google Shape;98;p20"/>
+          <p:cNvSpPr/>
+          <p:nvPr/>
+        </p:nvSpPr>
+        <p:spPr>
+          <a:xfrm>
+            <a:off x="14151502" y="7686821"/>
+            <a:ext cx="319800" cy="319800"/>
+          </a:xfrm>
+          <a:prstGeom prst="ellipse">
+            <a:avLst/>
+          </a:prstGeom>
+          <a:solidFill>
+            <a:schemeClr val="lt1"/>
+          </a:solidFill>
+          <a:ln>
+            <a:noFill/>
+          </a:ln>
+        </p:spPr>
+        <p:txBody>
+          <a:bodyPr spcFirstLastPara="1" wrap="square" lIns="109700" tIns="54850" rIns="109700" bIns="54850" anchor="ctr" anchorCtr="0">
+            <a:noAutofit/>
+          </a:bodyPr>
+          <a:lstStyle/>
+          <a:p>
+            <a:pPr marL="0" marR="0" lvl="0" indent="0" algn="ctr" rtl="0">
+              <a:spcBef>
+                <a:spcPts val="0"/>
+              </a:spcBef>
+              <a:spcAft>
+                <a:spcPts val="0"/>
+              </a:spcAft>
+              <a:buNone/>
+            </a:pPr>
+            <a:endParaRPr sz="2200" b="0" i="0" u="none" strike="noStrike" cap="none">
+              <a:solidFill>
+                <a:schemeClr val="dk1"/>
+              </a:solidFill>
+              <a:latin typeface="Calibri"/>
+              <a:ea typeface="Calibri"/>
+              <a:cs typeface="Calibri"/>
+              <a:sym typeface="Calibri"/>
+            </a:endParaRPr>
+          </a:p>
+        </p:txBody>
+      </p:sp>
+    </p:spTree>
+    <p:extLst>
+      <p:ext uri="{BB962C8B-B14F-4D97-AF65-F5344CB8AC3E}">
+        <p14:creationId xmlns:p14="http://schemas.microsoft.com/office/powerpoint/2010/main" val="2605684483"/>
+      </p:ext>
+    </p:extLst>
+  </p:cSld>
+  <p:clrMapOvr>
+    <a:masterClrMapping/>
+  </p:clrMapOvr>
+</p:sldLayout>
+</file>
+
 <file path=ppt/slideLayouts/slideLayout2.xml><?xml version="1.0" encoding="utf-8"?>
 <p:sldLayout xmlns:a="http://schemas.openxmlformats.org/drawingml/2006/main" xmlns:r="http://schemas.openxmlformats.org/officeDocument/2006/relationships" xmlns:p="http://schemas.openxmlformats.org/presentationml/2006/main" matchingName="Slide 2 master">
   <p:cSld name="Slide 2 master">
@@ -5567,6 +6764,7 @@
     <p:sldLayoutId id="2147483663" r:id="rId16"/>
     <p:sldLayoutId id="2147483664" r:id="rId17"/>
     <p:sldLayoutId id="2147483665" r:id="rId18"/>
+    <p:sldLayoutId id="2147483668" r:id="rId19"/>
   </p:sldLayoutIdLst>
   <p:hf sldNum="0" hdr="0" ftr="0" dt="0"/>
   <p:txStyles>
@@ -6431,7 +7629,7 @@
               <a:buSzPts val="2900"/>
               <a:buNone/>
             </a:pPr>
-            <a:endParaRPr dirty="0"/>
+            <a:endParaRPr lang="zh-TW" altLang="en-US" dirty="0"/>
           </a:p>
         </p:txBody>
       </p:sp>
@@ -6680,6 +7878,77 @@
             <a:fld id="{00000000-1234-1234-1234-123412341234}" type="slidenum">
               <a:rPr lang="en-US"/>
               <a:t>2</a:t>
+            </a:fld>
+            <a:endParaRPr/>
+          </a:p>
+        </p:txBody>
+      </p:sp>
+    </p:spTree>
+  </p:cSld>
+  <p:clrMapOvr>
+    <a:masterClrMapping/>
+  </p:clrMapOvr>
+</p:sld>
+</file>
+
+<file path=ppt/slides/slide3.xml><?xml version="1.0" encoding="utf-8"?>
+<p:sld xmlns:a="http://schemas.openxmlformats.org/drawingml/2006/main" xmlns:r="http://schemas.openxmlformats.org/officeDocument/2006/relationships" xmlns:p="http://schemas.openxmlformats.org/presentationml/2006/main">
+  <p:cSld>
+    <p:spTree>
+      <p:nvGrpSpPr>
+        <p:cNvPr id="1" name="Shape 116"/>
+        <p:cNvGrpSpPr/>
+        <p:nvPr/>
+      </p:nvGrpSpPr>
+      <p:grpSpPr>
+        <a:xfrm>
+          <a:off x="0" y="0"/>
+          <a:ext cx="0" cy="0"/>
+          <a:chOff x="0" y="0"/>
+          <a:chExt cx="0" cy="0"/>
+        </a:xfrm>
+      </p:grpSpPr>
+      <p:sp>
+        <p:nvSpPr>
+          <p:cNvPr id="117" name="Google Shape;117;p23"/>
+          <p:cNvSpPr txBox="1">
+            <a:spLocks noGrp="1"/>
+          </p:cNvSpPr>
+          <p:nvPr>
+            <p:ph type="sldNum" idx="12"/>
+          </p:nvPr>
+        </p:nvSpPr>
+        <p:spPr>
+          <a:xfrm>
+            <a:off x="11170264" y="7627620"/>
+            <a:ext cx="3291900" cy="438000"/>
+          </a:xfrm>
+          <a:prstGeom prst="rect">
+            <a:avLst/>
+          </a:prstGeom>
+          <a:noFill/>
+          <a:ln>
+            <a:noFill/>
+          </a:ln>
+        </p:spPr>
+        <p:txBody>
+          <a:bodyPr spcFirstLastPara="1" wrap="square" lIns="109700" tIns="54850" rIns="109700" bIns="54850" anchor="ctr" anchorCtr="0">
+            <a:noAutofit/>
+          </a:bodyPr>
+          <a:lstStyle/>
+          <a:p>
+            <a:pPr marL="0" lvl="0" indent="0" algn="r" rtl="0">
+              <a:spcBef>
+                <a:spcPts val="0"/>
+              </a:spcBef>
+              <a:spcAft>
+                <a:spcPts val="0"/>
+              </a:spcAft>
+              <a:buNone/>
+            </a:pPr>
+            <a:fld id="{00000000-1234-1234-1234-123412341234}" type="slidenum">
+              <a:rPr lang="en-US"/>
+              <a:t>3</a:t>
             </a:fld>
             <a:endParaRPr/>
           </a:p>
